--- a/instructor/modules/Module09-AI-Assistants.pptx
+++ b/instructor/modules/Module09-AI-Assistants.pptx
@@ -14215,7 +14215,7 @@
                 <a:ea typeface="Arial" pitchFamily="34" charset="-122"/>
                 <a:cs typeface="Arial" pitchFamily="34" charset="-120"/>
               </a:rPr>
-              <a:t>Use a feature branch. Squash to one commit per migrated module</a:t>
+              <a:t>Commit each migrated module as its own change — one change, one revert path</a:t>
             </a:r>
             <a:endParaRPr lang="en-US" sz="1200" dirty="0"/>
           </a:p>
@@ -16913,7 +16913,7 @@
                 <a:ea typeface="Arial" pitchFamily="34" charset="-122"/>
                 <a:cs typeface="Arial" pitchFamily="34" charset="-120"/>
               </a:rPr>
-              <a:t>Submit code + written code review on a feature branch</a:t>
+              <a:t>End with working code + a written self-review listing the issues you caught</a:t>
             </a:r>
             <a:endParaRPr lang="en-US" sz="1250" dirty="0"/>
           </a:p>
